--- a/lectures/b07/ppt/b07-l10.pptx
+++ b/lectures/b07/ppt/b07-l10.pptx
@@ -4331,7 +4331,7 @@
                 <a:ea typeface="Malgun Gothic"/>
                 <a:cs typeface="Malgun Gothic"/>
               </a:rPr>
-              <a:t>기억상실 증후군: 알츠하이머(내후각·해마 초기), 베르니케-코르사코프(유두체·시상 — B05 L09), 단순포진 뇌염(측두엽·변연), 자가면역 변연계 뇌염(LGI1 — B08 L10), 저산소(CA1), 일과성 전기억상실(해마 CA1 점상 DWI 병변, 수 시간 내 회복).</a:t>
+              <a:t>기억상실 증후군: 알츠하이머(내후각·해마 초기), 베르니케-코르사코프(유두체·시상 — B05 L09), 단순포진 뇌염(측두엽·변연), 자가면역 변연계 뇌염(LGI1 — B08 L06), 저산소(CA1), 일과성 전기억상실(해마 CA1 점상 DWI 병변, 수 시간 내 회복).</a:t>
             </a:r>
           </a:p>
         </p:txBody>
